--- a/ChatApp_Build_Plan_v1.pptx
+++ b/ChatApp_Build_Plan_v1.pptx
@@ -109,6 +109,11 @@
       </a:defRPr>
     </a:lvl9pPr>
   </p:defaultTextStyle>
+  <p:extLst>
+    <p:ext uri="{EFAFB233-063F-42B5-8137-9DF3F51BA10A}">
+      <p15:sldGuideLst xmlns:p15="http://schemas.microsoft.com/office/powerpoint/2012/main"/>
+    </p:ext>
+  </p:extLst>
 </p:presentation>
 </file>
 
@@ -4592,7 +4597,7 @@
                 <a:ea typeface="Cascadia Code" panose="020B0609020000020004" pitchFamily="49" charset="0"/>
                 <a:cs typeface="Cascadia Code" panose="020B0609020000020004" pitchFamily="49" charset="0"/>
               </a:rPr>
-              <a:t>Render </a:t>
+              <a:t> Render </a:t>
             </a:r>
           </a:p>
           <a:p>
@@ -4613,6 +4618,14 @@
               <a:buFont typeface="Arial" panose="020B0604020202020204" pitchFamily="34" charset="0"/>
               <a:buChar char="•"/>
             </a:pPr>
+            <a:r>
+              <a:rPr lang="en-IN" sz="1600" dirty="0">
+                <a:latin typeface="Abadi" panose="020B0604020104020204" pitchFamily="34" charset="0"/>
+                <a:ea typeface="Cascadia Code" panose="020B0609020000020004" pitchFamily="49" charset="0"/>
+                <a:cs typeface="Cascadia Code" panose="020B0609020000020004" pitchFamily="49" charset="0"/>
+              </a:rPr>
+              <a:t> </a:t>
+            </a:r>
             <a:r>
               <a:rPr lang="en-IN" sz="1600" dirty="0" err="1">
                 <a:latin typeface="Abadi" panose="020B0604020104020204" pitchFamily="34" charset="0"/>
@@ -6492,8 +6505,8 @@
           </a:prstGeom>
         </p:spPr>
       </p:pic>
-      <mc:AlternateContent xmlns:mc="http://schemas.openxmlformats.org/markup-compatibility/2006">
-        <mc:Choice xmlns:p14="http://schemas.microsoft.com/office/powerpoint/2010/main" Requires="p14">
+      <mc:AlternateContent xmlns:mc="http://schemas.openxmlformats.org/markup-compatibility/2006" xmlns:p14="http://schemas.microsoft.com/office/powerpoint/2010/main">
+        <mc:Choice Requires="p14">
           <p:contentPart p14:bwMode="auto" r:id="rId3">
             <p14:nvContentPartPr>
               <p14:cNvPr id="11" name="Ink 10">
@@ -6512,7 +6525,7 @@
             </p14:xfrm>
           </p:contentPart>
         </mc:Choice>
-        <mc:Fallback>
+        <mc:Fallback xmlns="">
           <p:pic>
             <p:nvPicPr>
               <p:cNvPr id="11" name="Ink 10">
